--- a/lightning-lesson/Is_Your_Work_Still_Building_You_Free_Lightning_Lesson_v1.0.pptx
+++ b/lightning-lesson/Is_Your_Work_Still_Building_You_Free_Lightning_Lesson_v1.0.pptx
@@ -655,7 +655,7 @@
               <a:rPr sz="1100">
                 <a:latin typeface="DM Sans"/>
               </a:rPr>
-              <a:t>Low Optionality is a reading about travel. It is not a reading about worth. Capable people often collapse these. When they do, they either overstay in a role they have outgrown or leave in a hurry they cannot afford.</a:t>
+              <a:t>Low Optionality is a reading about travel. It is not a reading about worth. Capable people often collapse these. When capable people collapse the reading into a verdict, they may make decisions based on an incomplete understanding of what their current position has actually formed.</a:t>
             </a:r>
           </a:p>
           <a:p>
@@ -1195,7 +1195,7 @@
               <a:rPr sz="1100">
                 <a:latin typeface="DM Sans"/>
               </a:rPr>
-              <a:t>If today helped you notice a pattern, the full Position Read is where that pattern gets examined with evidence. Registration is open. Bring a question, not a resume.</a:t>
+              <a:t>If today helped you notice a pattern, the full Position Read is where that pattern gets examined with evidence. Registration is open. Come prepared to examine one consequential question about your current work.</a:t>
             </a:r>
           </a:p>
           <a:p>
@@ -6561,178 +6561,6 @@
       <p:grpSpPr/>
       <p:sp>
         <p:nvSpPr>
-          <p:cNvPr id="2" name="Oval 1"/>
-          <p:cNvSpPr/>
-          <p:nvPr/>
-        </p:nvSpPr>
-        <p:spPr>
-          <a:xfrm>
-            <a:off x="11384280" y="310896"/>
-            <a:ext cx="128016" cy="128016"/>
-          </a:xfrm>
-          <a:prstGeom prst="ellipse">
-            <a:avLst/>
-          </a:prstGeom>
-          <a:solidFill>
-            <a:srgbClr val="0F2347"/>
-          </a:solidFill>
-          <a:ln>
-            <a:noFill/>
-          </a:ln>
-        </p:spPr>
-        <p:style>
-          <a:lnRef idx="1">
-            <a:schemeClr val="accent1"/>
-          </a:lnRef>
-          <a:fillRef idx="3">
-            <a:schemeClr val="accent1"/>
-          </a:fillRef>
-          <a:effectRef idx="2">
-            <a:schemeClr val="accent1"/>
-          </a:effectRef>
-          <a:fontRef idx="minor">
-            <a:schemeClr val="lt1"/>
-          </a:fontRef>
-        </p:style>
-        <p:txBody>
-          <a:bodyPr rtlCol="0" anchor="ctr"/>
-          <a:lstStyle/>
-          <a:p>
-            <a:pPr algn="ctr"/>
-          </a:p>
-        </p:txBody>
-      </p:sp>
-      <p:sp>
-        <p:nvSpPr>
-          <p:cNvPr id="3" name="Oval 2"/>
-          <p:cNvSpPr/>
-          <p:nvPr/>
-        </p:nvSpPr>
-        <p:spPr>
-          <a:xfrm>
-            <a:off x="11585448" y="310896"/>
-            <a:ext cx="128016" cy="128016"/>
-          </a:xfrm>
-          <a:prstGeom prst="ellipse">
-            <a:avLst/>
-          </a:prstGeom>
-          <a:solidFill>
-            <a:srgbClr val="C1440E"/>
-          </a:solidFill>
-          <a:ln>
-            <a:noFill/>
-          </a:ln>
-        </p:spPr>
-        <p:style>
-          <a:lnRef idx="1">
-            <a:schemeClr val="accent1"/>
-          </a:lnRef>
-          <a:fillRef idx="3">
-            <a:schemeClr val="accent1"/>
-          </a:fillRef>
-          <a:effectRef idx="2">
-            <a:schemeClr val="accent1"/>
-          </a:effectRef>
-          <a:fontRef idx="minor">
-            <a:schemeClr val="lt1"/>
-          </a:fontRef>
-        </p:style>
-        <p:txBody>
-          <a:bodyPr rtlCol="0" anchor="ctr"/>
-          <a:lstStyle/>
-          <a:p>
-            <a:pPr algn="ctr"/>
-          </a:p>
-        </p:txBody>
-      </p:sp>
-      <p:sp>
-        <p:nvSpPr>
-          <p:cNvPr id="4" name="Oval 3"/>
-          <p:cNvSpPr/>
-          <p:nvPr/>
-        </p:nvSpPr>
-        <p:spPr>
-          <a:xfrm>
-            <a:off x="11384280" y="512064"/>
-            <a:ext cx="128016" cy="128016"/>
-          </a:xfrm>
-          <a:prstGeom prst="ellipse">
-            <a:avLst/>
-          </a:prstGeom>
-          <a:solidFill>
-            <a:srgbClr val="0F2347"/>
-          </a:solidFill>
-          <a:ln>
-            <a:noFill/>
-          </a:ln>
-        </p:spPr>
-        <p:style>
-          <a:lnRef idx="1">
-            <a:schemeClr val="accent1"/>
-          </a:lnRef>
-          <a:fillRef idx="3">
-            <a:schemeClr val="accent1"/>
-          </a:fillRef>
-          <a:effectRef idx="2">
-            <a:schemeClr val="accent1"/>
-          </a:effectRef>
-          <a:fontRef idx="minor">
-            <a:schemeClr val="lt1"/>
-          </a:fontRef>
-        </p:style>
-        <p:txBody>
-          <a:bodyPr rtlCol="0" anchor="ctr"/>
-          <a:lstStyle/>
-          <a:p>
-            <a:pPr algn="ctr"/>
-          </a:p>
-        </p:txBody>
-      </p:sp>
-      <p:sp>
-        <p:nvSpPr>
-          <p:cNvPr id="5" name="Oval 4"/>
-          <p:cNvSpPr/>
-          <p:nvPr/>
-        </p:nvSpPr>
-        <p:spPr>
-          <a:xfrm>
-            <a:off x="11585448" y="512064"/>
-            <a:ext cx="128016" cy="128016"/>
-          </a:xfrm>
-          <a:prstGeom prst="ellipse">
-            <a:avLst/>
-          </a:prstGeom>
-          <a:solidFill>
-            <a:srgbClr val="0F2347"/>
-          </a:solidFill>
-          <a:ln>
-            <a:noFill/>
-          </a:ln>
-        </p:spPr>
-        <p:style>
-          <a:lnRef idx="1">
-            <a:schemeClr val="accent1"/>
-          </a:lnRef>
-          <a:fillRef idx="3">
-            <a:schemeClr val="accent1"/>
-          </a:fillRef>
-          <a:effectRef idx="2">
-            <a:schemeClr val="accent1"/>
-          </a:effectRef>
-          <a:fontRef idx="minor">
-            <a:schemeClr val="lt1"/>
-          </a:fontRef>
-        </p:style>
-        <p:txBody>
-          <a:bodyPr rtlCol="0" anchor="ctr"/>
-          <a:lstStyle/>
-          <a:p>
-            <a:pPr algn="ctr"/>
-          </a:p>
-        </p:txBody>
-      </p:sp>
-      <p:sp>
-        <p:nvSpPr>
           <p:cNvPr id="6" name="TextBox 5"/>
           <p:cNvSpPr txBox="1"/>
           <p:nvPr/>
@@ -7141,178 +6969,6 @@
       <p:grpSpPr/>
       <p:sp>
         <p:nvSpPr>
-          <p:cNvPr id="2" name="Oval 1"/>
-          <p:cNvSpPr/>
-          <p:nvPr/>
-        </p:nvSpPr>
-        <p:spPr>
-          <a:xfrm>
-            <a:off x="11384280" y="310896"/>
-            <a:ext cx="128016" cy="128016"/>
-          </a:xfrm>
-          <a:prstGeom prst="ellipse">
-            <a:avLst/>
-          </a:prstGeom>
-          <a:solidFill>
-            <a:srgbClr val="0F2347"/>
-          </a:solidFill>
-          <a:ln>
-            <a:noFill/>
-          </a:ln>
-        </p:spPr>
-        <p:style>
-          <a:lnRef idx="1">
-            <a:schemeClr val="accent1"/>
-          </a:lnRef>
-          <a:fillRef idx="3">
-            <a:schemeClr val="accent1"/>
-          </a:fillRef>
-          <a:effectRef idx="2">
-            <a:schemeClr val="accent1"/>
-          </a:effectRef>
-          <a:fontRef idx="minor">
-            <a:schemeClr val="lt1"/>
-          </a:fontRef>
-        </p:style>
-        <p:txBody>
-          <a:bodyPr rtlCol="0" anchor="ctr"/>
-          <a:lstStyle/>
-          <a:p>
-            <a:pPr algn="ctr"/>
-          </a:p>
-        </p:txBody>
-      </p:sp>
-      <p:sp>
-        <p:nvSpPr>
-          <p:cNvPr id="3" name="Oval 2"/>
-          <p:cNvSpPr/>
-          <p:nvPr/>
-        </p:nvSpPr>
-        <p:spPr>
-          <a:xfrm>
-            <a:off x="11585448" y="310896"/>
-            <a:ext cx="128016" cy="128016"/>
-          </a:xfrm>
-          <a:prstGeom prst="ellipse">
-            <a:avLst/>
-          </a:prstGeom>
-          <a:solidFill>
-            <a:srgbClr val="C1440E"/>
-          </a:solidFill>
-          <a:ln>
-            <a:noFill/>
-          </a:ln>
-        </p:spPr>
-        <p:style>
-          <a:lnRef idx="1">
-            <a:schemeClr val="accent1"/>
-          </a:lnRef>
-          <a:fillRef idx="3">
-            <a:schemeClr val="accent1"/>
-          </a:fillRef>
-          <a:effectRef idx="2">
-            <a:schemeClr val="accent1"/>
-          </a:effectRef>
-          <a:fontRef idx="minor">
-            <a:schemeClr val="lt1"/>
-          </a:fontRef>
-        </p:style>
-        <p:txBody>
-          <a:bodyPr rtlCol="0" anchor="ctr"/>
-          <a:lstStyle/>
-          <a:p>
-            <a:pPr algn="ctr"/>
-          </a:p>
-        </p:txBody>
-      </p:sp>
-      <p:sp>
-        <p:nvSpPr>
-          <p:cNvPr id="4" name="Oval 3"/>
-          <p:cNvSpPr/>
-          <p:nvPr/>
-        </p:nvSpPr>
-        <p:spPr>
-          <a:xfrm>
-            <a:off x="11384280" y="512064"/>
-            <a:ext cx="128016" cy="128016"/>
-          </a:xfrm>
-          <a:prstGeom prst="ellipse">
-            <a:avLst/>
-          </a:prstGeom>
-          <a:solidFill>
-            <a:srgbClr val="0F2347"/>
-          </a:solidFill>
-          <a:ln>
-            <a:noFill/>
-          </a:ln>
-        </p:spPr>
-        <p:style>
-          <a:lnRef idx="1">
-            <a:schemeClr val="accent1"/>
-          </a:lnRef>
-          <a:fillRef idx="3">
-            <a:schemeClr val="accent1"/>
-          </a:fillRef>
-          <a:effectRef idx="2">
-            <a:schemeClr val="accent1"/>
-          </a:effectRef>
-          <a:fontRef idx="minor">
-            <a:schemeClr val="lt1"/>
-          </a:fontRef>
-        </p:style>
-        <p:txBody>
-          <a:bodyPr rtlCol="0" anchor="ctr"/>
-          <a:lstStyle/>
-          <a:p>
-            <a:pPr algn="ctr"/>
-          </a:p>
-        </p:txBody>
-      </p:sp>
-      <p:sp>
-        <p:nvSpPr>
-          <p:cNvPr id="5" name="Oval 4"/>
-          <p:cNvSpPr/>
-          <p:nvPr/>
-        </p:nvSpPr>
-        <p:spPr>
-          <a:xfrm>
-            <a:off x="11585448" y="512064"/>
-            <a:ext cx="128016" cy="128016"/>
-          </a:xfrm>
-          <a:prstGeom prst="ellipse">
-            <a:avLst/>
-          </a:prstGeom>
-          <a:solidFill>
-            <a:srgbClr val="0F2347"/>
-          </a:solidFill>
-          <a:ln>
-            <a:noFill/>
-          </a:ln>
-        </p:spPr>
-        <p:style>
-          <a:lnRef idx="1">
-            <a:schemeClr val="accent1"/>
-          </a:lnRef>
-          <a:fillRef idx="3">
-            <a:schemeClr val="accent1"/>
-          </a:fillRef>
-          <a:effectRef idx="2">
-            <a:schemeClr val="accent1"/>
-          </a:effectRef>
-          <a:fontRef idx="minor">
-            <a:schemeClr val="lt1"/>
-          </a:fontRef>
-        </p:style>
-        <p:txBody>
-          <a:bodyPr rtlCol="0" anchor="ctr"/>
-          <a:lstStyle/>
-          <a:p>
-            <a:pPr algn="ctr"/>
-          </a:p>
-        </p:txBody>
-      </p:sp>
-      <p:sp>
-        <p:nvSpPr>
           <p:cNvPr id="6" name="TextBox 5"/>
           <p:cNvSpPr txBox="1"/>
           <p:nvPr/>
@@ -10029,178 +9685,6 @@
       <p:grpSpPr/>
       <p:sp>
         <p:nvSpPr>
-          <p:cNvPr id="2" name="Oval 1"/>
-          <p:cNvSpPr/>
-          <p:nvPr/>
-        </p:nvSpPr>
-        <p:spPr>
-          <a:xfrm>
-            <a:off x="11384280" y="310896"/>
-            <a:ext cx="128016" cy="128016"/>
-          </a:xfrm>
-          <a:prstGeom prst="ellipse">
-            <a:avLst/>
-          </a:prstGeom>
-          <a:solidFill>
-            <a:srgbClr val="0F2347"/>
-          </a:solidFill>
-          <a:ln>
-            <a:noFill/>
-          </a:ln>
-        </p:spPr>
-        <p:style>
-          <a:lnRef idx="1">
-            <a:schemeClr val="accent1"/>
-          </a:lnRef>
-          <a:fillRef idx="3">
-            <a:schemeClr val="accent1"/>
-          </a:fillRef>
-          <a:effectRef idx="2">
-            <a:schemeClr val="accent1"/>
-          </a:effectRef>
-          <a:fontRef idx="minor">
-            <a:schemeClr val="lt1"/>
-          </a:fontRef>
-        </p:style>
-        <p:txBody>
-          <a:bodyPr rtlCol="0" anchor="ctr"/>
-          <a:lstStyle/>
-          <a:p>
-            <a:pPr algn="ctr"/>
-          </a:p>
-        </p:txBody>
-      </p:sp>
-      <p:sp>
-        <p:nvSpPr>
-          <p:cNvPr id="3" name="Oval 2"/>
-          <p:cNvSpPr/>
-          <p:nvPr/>
-        </p:nvSpPr>
-        <p:spPr>
-          <a:xfrm>
-            <a:off x="11585448" y="310896"/>
-            <a:ext cx="128016" cy="128016"/>
-          </a:xfrm>
-          <a:prstGeom prst="ellipse">
-            <a:avLst/>
-          </a:prstGeom>
-          <a:solidFill>
-            <a:srgbClr val="C1440E"/>
-          </a:solidFill>
-          <a:ln>
-            <a:noFill/>
-          </a:ln>
-        </p:spPr>
-        <p:style>
-          <a:lnRef idx="1">
-            <a:schemeClr val="accent1"/>
-          </a:lnRef>
-          <a:fillRef idx="3">
-            <a:schemeClr val="accent1"/>
-          </a:fillRef>
-          <a:effectRef idx="2">
-            <a:schemeClr val="accent1"/>
-          </a:effectRef>
-          <a:fontRef idx="minor">
-            <a:schemeClr val="lt1"/>
-          </a:fontRef>
-        </p:style>
-        <p:txBody>
-          <a:bodyPr rtlCol="0" anchor="ctr"/>
-          <a:lstStyle/>
-          <a:p>
-            <a:pPr algn="ctr"/>
-          </a:p>
-        </p:txBody>
-      </p:sp>
-      <p:sp>
-        <p:nvSpPr>
-          <p:cNvPr id="4" name="Oval 3"/>
-          <p:cNvSpPr/>
-          <p:nvPr/>
-        </p:nvSpPr>
-        <p:spPr>
-          <a:xfrm>
-            <a:off x="11384280" y="512064"/>
-            <a:ext cx="128016" cy="128016"/>
-          </a:xfrm>
-          <a:prstGeom prst="ellipse">
-            <a:avLst/>
-          </a:prstGeom>
-          <a:solidFill>
-            <a:srgbClr val="0F2347"/>
-          </a:solidFill>
-          <a:ln>
-            <a:noFill/>
-          </a:ln>
-        </p:spPr>
-        <p:style>
-          <a:lnRef idx="1">
-            <a:schemeClr val="accent1"/>
-          </a:lnRef>
-          <a:fillRef idx="3">
-            <a:schemeClr val="accent1"/>
-          </a:fillRef>
-          <a:effectRef idx="2">
-            <a:schemeClr val="accent1"/>
-          </a:effectRef>
-          <a:fontRef idx="minor">
-            <a:schemeClr val="lt1"/>
-          </a:fontRef>
-        </p:style>
-        <p:txBody>
-          <a:bodyPr rtlCol="0" anchor="ctr"/>
-          <a:lstStyle/>
-          <a:p>
-            <a:pPr algn="ctr"/>
-          </a:p>
-        </p:txBody>
-      </p:sp>
-      <p:sp>
-        <p:nvSpPr>
-          <p:cNvPr id="5" name="Oval 4"/>
-          <p:cNvSpPr/>
-          <p:nvPr/>
-        </p:nvSpPr>
-        <p:spPr>
-          <a:xfrm>
-            <a:off x="11585448" y="512064"/>
-            <a:ext cx="128016" cy="128016"/>
-          </a:xfrm>
-          <a:prstGeom prst="ellipse">
-            <a:avLst/>
-          </a:prstGeom>
-          <a:solidFill>
-            <a:srgbClr val="0F2347"/>
-          </a:solidFill>
-          <a:ln>
-            <a:noFill/>
-          </a:ln>
-        </p:spPr>
-        <p:style>
-          <a:lnRef idx="1">
-            <a:schemeClr val="accent1"/>
-          </a:lnRef>
-          <a:fillRef idx="3">
-            <a:schemeClr val="accent1"/>
-          </a:fillRef>
-          <a:effectRef idx="2">
-            <a:schemeClr val="accent1"/>
-          </a:effectRef>
-          <a:fontRef idx="minor">
-            <a:schemeClr val="lt1"/>
-          </a:fontRef>
-        </p:style>
-        <p:txBody>
-          <a:bodyPr rtlCol="0" anchor="ctr"/>
-          <a:lstStyle/>
-          <a:p>
-            <a:pPr algn="ctr"/>
-          </a:p>
-        </p:txBody>
-      </p:sp>
-      <p:sp>
-        <p:nvSpPr>
           <p:cNvPr id="6" name="TextBox 5"/>
           <p:cNvSpPr txBox="1"/>
           <p:nvPr/>
@@ -10662,178 +10146,6 @@
       <p:grpSpPr/>
       <p:sp>
         <p:nvSpPr>
-          <p:cNvPr id="2" name="Oval 1"/>
-          <p:cNvSpPr/>
-          <p:nvPr/>
-        </p:nvSpPr>
-        <p:spPr>
-          <a:xfrm>
-            <a:off x="11384280" y="310896"/>
-            <a:ext cx="128016" cy="128016"/>
-          </a:xfrm>
-          <a:prstGeom prst="ellipse">
-            <a:avLst/>
-          </a:prstGeom>
-          <a:solidFill>
-            <a:srgbClr val="0F2347"/>
-          </a:solidFill>
-          <a:ln>
-            <a:noFill/>
-          </a:ln>
-        </p:spPr>
-        <p:style>
-          <a:lnRef idx="1">
-            <a:schemeClr val="accent1"/>
-          </a:lnRef>
-          <a:fillRef idx="3">
-            <a:schemeClr val="accent1"/>
-          </a:fillRef>
-          <a:effectRef idx="2">
-            <a:schemeClr val="accent1"/>
-          </a:effectRef>
-          <a:fontRef idx="minor">
-            <a:schemeClr val="lt1"/>
-          </a:fontRef>
-        </p:style>
-        <p:txBody>
-          <a:bodyPr rtlCol="0" anchor="ctr"/>
-          <a:lstStyle/>
-          <a:p>
-            <a:pPr algn="ctr"/>
-          </a:p>
-        </p:txBody>
-      </p:sp>
-      <p:sp>
-        <p:nvSpPr>
-          <p:cNvPr id="3" name="Oval 2"/>
-          <p:cNvSpPr/>
-          <p:nvPr/>
-        </p:nvSpPr>
-        <p:spPr>
-          <a:xfrm>
-            <a:off x="11585448" y="310896"/>
-            <a:ext cx="128016" cy="128016"/>
-          </a:xfrm>
-          <a:prstGeom prst="ellipse">
-            <a:avLst/>
-          </a:prstGeom>
-          <a:solidFill>
-            <a:srgbClr val="C1440E"/>
-          </a:solidFill>
-          <a:ln>
-            <a:noFill/>
-          </a:ln>
-        </p:spPr>
-        <p:style>
-          <a:lnRef idx="1">
-            <a:schemeClr val="accent1"/>
-          </a:lnRef>
-          <a:fillRef idx="3">
-            <a:schemeClr val="accent1"/>
-          </a:fillRef>
-          <a:effectRef idx="2">
-            <a:schemeClr val="accent1"/>
-          </a:effectRef>
-          <a:fontRef idx="minor">
-            <a:schemeClr val="lt1"/>
-          </a:fontRef>
-        </p:style>
-        <p:txBody>
-          <a:bodyPr rtlCol="0" anchor="ctr"/>
-          <a:lstStyle/>
-          <a:p>
-            <a:pPr algn="ctr"/>
-          </a:p>
-        </p:txBody>
-      </p:sp>
-      <p:sp>
-        <p:nvSpPr>
-          <p:cNvPr id="4" name="Oval 3"/>
-          <p:cNvSpPr/>
-          <p:nvPr/>
-        </p:nvSpPr>
-        <p:spPr>
-          <a:xfrm>
-            <a:off x="11384280" y="512064"/>
-            <a:ext cx="128016" cy="128016"/>
-          </a:xfrm>
-          <a:prstGeom prst="ellipse">
-            <a:avLst/>
-          </a:prstGeom>
-          <a:solidFill>
-            <a:srgbClr val="0F2347"/>
-          </a:solidFill>
-          <a:ln>
-            <a:noFill/>
-          </a:ln>
-        </p:spPr>
-        <p:style>
-          <a:lnRef idx="1">
-            <a:schemeClr val="accent1"/>
-          </a:lnRef>
-          <a:fillRef idx="3">
-            <a:schemeClr val="accent1"/>
-          </a:fillRef>
-          <a:effectRef idx="2">
-            <a:schemeClr val="accent1"/>
-          </a:effectRef>
-          <a:fontRef idx="minor">
-            <a:schemeClr val="lt1"/>
-          </a:fontRef>
-        </p:style>
-        <p:txBody>
-          <a:bodyPr rtlCol="0" anchor="ctr"/>
-          <a:lstStyle/>
-          <a:p>
-            <a:pPr algn="ctr"/>
-          </a:p>
-        </p:txBody>
-      </p:sp>
-      <p:sp>
-        <p:nvSpPr>
-          <p:cNvPr id="5" name="Oval 4"/>
-          <p:cNvSpPr/>
-          <p:nvPr/>
-        </p:nvSpPr>
-        <p:spPr>
-          <a:xfrm>
-            <a:off x="11585448" y="512064"/>
-            <a:ext cx="128016" cy="128016"/>
-          </a:xfrm>
-          <a:prstGeom prst="ellipse">
-            <a:avLst/>
-          </a:prstGeom>
-          <a:solidFill>
-            <a:srgbClr val="0F2347"/>
-          </a:solidFill>
-          <a:ln>
-            <a:noFill/>
-          </a:ln>
-        </p:spPr>
-        <p:style>
-          <a:lnRef idx="1">
-            <a:schemeClr val="accent1"/>
-          </a:lnRef>
-          <a:fillRef idx="3">
-            <a:schemeClr val="accent1"/>
-          </a:fillRef>
-          <a:effectRef idx="2">
-            <a:schemeClr val="accent1"/>
-          </a:effectRef>
-          <a:fontRef idx="minor">
-            <a:schemeClr val="lt1"/>
-          </a:fontRef>
-        </p:style>
-        <p:txBody>
-          <a:bodyPr rtlCol="0" anchor="ctr"/>
-          <a:lstStyle/>
-          <a:p>
-            <a:pPr algn="ctr"/>
-          </a:p>
-        </p:txBody>
-      </p:sp>
-      <p:sp>
-        <p:nvSpPr>
           <p:cNvPr id="6" name="TextBox 5"/>
           <p:cNvSpPr txBox="1"/>
           <p:nvPr/>
@@ -12664,178 +11976,6 @@
       <p:grpSpPr/>
       <p:sp>
         <p:nvSpPr>
-          <p:cNvPr id="2" name="Oval 1"/>
-          <p:cNvSpPr/>
-          <p:nvPr/>
-        </p:nvSpPr>
-        <p:spPr>
-          <a:xfrm>
-            <a:off x="11384280" y="310896"/>
-            <a:ext cx="128016" cy="128016"/>
-          </a:xfrm>
-          <a:prstGeom prst="ellipse">
-            <a:avLst/>
-          </a:prstGeom>
-          <a:solidFill>
-            <a:srgbClr val="0F2347"/>
-          </a:solidFill>
-          <a:ln>
-            <a:noFill/>
-          </a:ln>
-        </p:spPr>
-        <p:style>
-          <a:lnRef idx="1">
-            <a:schemeClr val="accent1"/>
-          </a:lnRef>
-          <a:fillRef idx="3">
-            <a:schemeClr val="accent1"/>
-          </a:fillRef>
-          <a:effectRef idx="2">
-            <a:schemeClr val="accent1"/>
-          </a:effectRef>
-          <a:fontRef idx="minor">
-            <a:schemeClr val="lt1"/>
-          </a:fontRef>
-        </p:style>
-        <p:txBody>
-          <a:bodyPr rtlCol="0" anchor="ctr"/>
-          <a:lstStyle/>
-          <a:p>
-            <a:pPr algn="ctr"/>
-          </a:p>
-        </p:txBody>
-      </p:sp>
-      <p:sp>
-        <p:nvSpPr>
-          <p:cNvPr id="3" name="Oval 2"/>
-          <p:cNvSpPr/>
-          <p:nvPr/>
-        </p:nvSpPr>
-        <p:spPr>
-          <a:xfrm>
-            <a:off x="11585448" y="310896"/>
-            <a:ext cx="128016" cy="128016"/>
-          </a:xfrm>
-          <a:prstGeom prst="ellipse">
-            <a:avLst/>
-          </a:prstGeom>
-          <a:solidFill>
-            <a:srgbClr val="C1440E"/>
-          </a:solidFill>
-          <a:ln>
-            <a:noFill/>
-          </a:ln>
-        </p:spPr>
-        <p:style>
-          <a:lnRef idx="1">
-            <a:schemeClr val="accent1"/>
-          </a:lnRef>
-          <a:fillRef idx="3">
-            <a:schemeClr val="accent1"/>
-          </a:fillRef>
-          <a:effectRef idx="2">
-            <a:schemeClr val="accent1"/>
-          </a:effectRef>
-          <a:fontRef idx="minor">
-            <a:schemeClr val="lt1"/>
-          </a:fontRef>
-        </p:style>
-        <p:txBody>
-          <a:bodyPr rtlCol="0" anchor="ctr"/>
-          <a:lstStyle/>
-          <a:p>
-            <a:pPr algn="ctr"/>
-          </a:p>
-        </p:txBody>
-      </p:sp>
-      <p:sp>
-        <p:nvSpPr>
-          <p:cNvPr id="4" name="Oval 3"/>
-          <p:cNvSpPr/>
-          <p:nvPr/>
-        </p:nvSpPr>
-        <p:spPr>
-          <a:xfrm>
-            <a:off x="11384280" y="512064"/>
-            <a:ext cx="128016" cy="128016"/>
-          </a:xfrm>
-          <a:prstGeom prst="ellipse">
-            <a:avLst/>
-          </a:prstGeom>
-          <a:solidFill>
-            <a:srgbClr val="0F2347"/>
-          </a:solidFill>
-          <a:ln>
-            <a:noFill/>
-          </a:ln>
-        </p:spPr>
-        <p:style>
-          <a:lnRef idx="1">
-            <a:schemeClr val="accent1"/>
-          </a:lnRef>
-          <a:fillRef idx="3">
-            <a:schemeClr val="accent1"/>
-          </a:fillRef>
-          <a:effectRef idx="2">
-            <a:schemeClr val="accent1"/>
-          </a:effectRef>
-          <a:fontRef idx="minor">
-            <a:schemeClr val="lt1"/>
-          </a:fontRef>
-        </p:style>
-        <p:txBody>
-          <a:bodyPr rtlCol="0" anchor="ctr"/>
-          <a:lstStyle/>
-          <a:p>
-            <a:pPr algn="ctr"/>
-          </a:p>
-        </p:txBody>
-      </p:sp>
-      <p:sp>
-        <p:nvSpPr>
-          <p:cNvPr id="5" name="Oval 4"/>
-          <p:cNvSpPr/>
-          <p:nvPr/>
-        </p:nvSpPr>
-        <p:spPr>
-          <a:xfrm>
-            <a:off x="11585448" y="512064"/>
-            <a:ext cx="128016" cy="128016"/>
-          </a:xfrm>
-          <a:prstGeom prst="ellipse">
-            <a:avLst/>
-          </a:prstGeom>
-          <a:solidFill>
-            <a:srgbClr val="0F2347"/>
-          </a:solidFill>
-          <a:ln>
-            <a:noFill/>
-          </a:ln>
-        </p:spPr>
-        <p:style>
-          <a:lnRef idx="1">
-            <a:schemeClr val="accent1"/>
-          </a:lnRef>
-          <a:fillRef idx="3">
-            <a:schemeClr val="accent1"/>
-          </a:fillRef>
-          <a:effectRef idx="2">
-            <a:schemeClr val="accent1"/>
-          </a:effectRef>
-          <a:fontRef idx="minor">
-            <a:schemeClr val="lt1"/>
-          </a:fontRef>
-        </p:style>
-        <p:txBody>
-          <a:bodyPr rtlCol="0" anchor="ctr"/>
-          <a:lstStyle/>
-          <a:p>
-            <a:pPr algn="ctr"/>
-          </a:p>
-        </p:txBody>
-      </p:sp>
-      <p:sp>
-        <p:nvSpPr>
           <p:cNvPr id="6" name="TextBox 5"/>
           <p:cNvSpPr txBox="1"/>
           <p:nvPr/>
@@ -13884,178 +13024,6 @@
         <p:nvPr/>
       </p:nvGrpSpPr>
       <p:grpSpPr/>
-      <p:sp>
-        <p:nvSpPr>
-          <p:cNvPr id="2" name="Oval 1"/>
-          <p:cNvSpPr/>
-          <p:nvPr/>
-        </p:nvSpPr>
-        <p:spPr>
-          <a:xfrm>
-            <a:off x="11384280" y="310896"/>
-            <a:ext cx="128016" cy="128016"/>
-          </a:xfrm>
-          <a:prstGeom prst="ellipse">
-            <a:avLst/>
-          </a:prstGeom>
-          <a:solidFill>
-            <a:srgbClr val="0F2347"/>
-          </a:solidFill>
-          <a:ln>
-            <a:noFill/>
-          </a:ln>
-        </p:spPr>
-        <p:style>
-          <a:lnRef idx="1">
-            <a:schemeClr val="accent1"/>
-          </a:lnRef>
-          <a:fillRef idx="3">
-            <a:schemeClr val="accent1"/>
-          </a:fillRef>
-          <a:effectRef idx="2">
-            <a:schemeClr val="accent1"/>
-          </a:effectRef>
-          <a:fontRef idx="minor">
-            <a:schemeClr val="lt1"/>
-          </a:fontRef>
-        </p:style>
-        <p:txBody>
-          <a:bodyPr rtlCol="0" anchor="ctr"/>
-          <a:lstStyle/>
-          <a:p>
-            <a:pPr algn="ctr"/>
-          </a:p>
-        </p:txBody>
-      </p:sp>
-      <p:sp>
-        <p:nvSpPr>
-          <p:cNvPr id="3" name="Oval 2"/>
-          <p:cNvSpPr/>
-          <p:nvPr/>
-        </p:nvSpPr>
-        <p:spPr>
-          <a:xfrm>
-            <a:off x="11585448" y="310896"/>
-            <a:ext cx="128016" cy="128016"/>
-          </a:xfrm>
-          <a:prstGeom prst="ellipse">
-            <a:avLst/>
-          </a:prstGeom>
-          <a:solidFill>
-            <a:srgbClr val="C1440E"/>
-          </a:solidFill>
-          <a:ln>
-            <a:noFill/>
-          </a:ln>
-        </p:spPr>
-        <p:style>
-          <a:lnRef idx="1">
-            <a:schemeClr val="accent1"/>
-          </a:lnRef>
-          <a:fillRef idx="3">
-            <a:schemeClr val="accent1"/>
-          </a:fillRef>
-          <a:effectRef idx="2">
-            <a:schemeClr val="accent1"/>
-          </a:effectRef>
-          <a:fontRef idx="minor">
-            <a:schemeClr val="lt1"/>
-          </a:fontRef>
-        </p:style>
-        <p:txBody>
-          <a:bodyPr rtlCol="0" anchor="ctr"/>
-          <a:lstStyle/>
-          <a:p>
-            <a:pPr algn="ctr"/>
-          </a:p>
-        </p:txBody>
-      </p:sp>
-      <p:sp>
-        <p:nvSpPr>
-          <p:cNvPr id="4" name="Oval 3"/>
-          <p:cNvSpPr/>
-          <p:nvPr/>
-        </p:nvSpPr>
-        <p:spPr>
-          <a:xfrm>
-            <a:off x="11384280" y="512064"/>
-            <a:ext cx="128016" cy="128016"/>
-          </a:xfrm>
-          <a:prstGeom prst="ellipse">
-            <a:avLst/>
-          </a:prstGeom>
-          <a:solidFill>
-            <a:srgbClr val="0F2347"/>
-          </a:solidFill>
-          <a:ln>
-            <a:noFill/>
-          </a:ln>
-        </p:spPr>
-        <p:style>
-          <a:lnRef idx="1">
-            <a:schemeClr val="accent1"/>
-          </a:lnRef>
-          <a:fillRef idx="3">
-            <a:schemeClr val="accent1"/>
-          </a:fillRef>
-          <a:effectRef idx="2">
-            <a:schemeClr val="accent1"/>
-          </a:effectRef>
-          <a:fontRef idx="minor">
-            <a:schemeClr val="lt1"/>
-          </a:fontRef>
-        </p:style>
-        <p:txBody>
-          <a:bodyPr rtlCol="0" anchor="ctr"/>
-          <a:lstStyle/>
-          <a:p>
-            <a:pPr algn="ctr"/>
-          </a:p>
-        </p:txBody>
-      </p:sp>
-      <p:sp>
-        <p:nvSpPr>
-          <p:cNvPr id="5" name="Oval 4"/>
-          <p:cNvSpPr/>
-          <p:nvPr/>
-        </p:nvSpPr>
-        <p:spPr>
-          <a:xfrm>
-            <a:off x="11585448" y="512064"/>
-            <a:ext cx="128016" cy="128016"/>
-          </a:xfrm>
-          <a:prstGeom prst="ellipse">
-            <a:avLst/>
-          </a:prstGeom>
-          <a:solidFill>
-            <a:srgbClr val="0F2347"/>
-          </a:solidFill>
-          <a:ln>
-            <a:noFill/>
-          </a:ln>
-        </p:spPr>
-        <p:style>
-          <a:lnRef idx="1">
-            <a:schemeClr val="accent1"/>
-          </a:lnRef>
-          <a:fillRef idx="3">
-            <a:schemeClr val="accent1"/>
-          </a:fillRef>
-          <a:effectRef idx="2">
-            <a:schemeClr val="accent1"/>
-          </a:effectRef>
-          <a:fontRef idx="minor">
-            <a:schemeClr val="lt1"/>
-          </a:fontRef>
-        </p:style>
-        <p:txBody>
-          <a:bodyPr rtlCol="0" anchor="ctr"/>
-          <a:lstStyle/>
-          <a:p>
-            <a:pPr algn="ctr"/>
-          </a:p>
-        </p:txBody>
-      </p:sp>
       <p:sp>
         <p:nvSpPr>
           <p:cNvPr id="6" name="TextBox 5"/>
